--- a/06_relazioni_e_parametri/Slides_v3/03_obiettivi.pptx
+++ b/06_relazioni_e_parametri/Slides_v3/03_obiettivi.pptx
@@ -8,7 +8,7 @@
     <p:notesMasterId r:id="rId3"/>
   </p:notesMasterIdLst>
   <p:sldIdLst>
-    <p:sldId id="256" r:id="rId2"/>
+    <p:sldId id="271" r:id="rId2"/>
   </p:sldIdLst>
   <p:sldSz cx="12192000" cy="6858000"/>
   <p:notesSz cx="6858000" cy="12192000"/>
@@ -635,15 +635,7 @@
 
 <file path=ppt/slides/slide1.xml><?xml version="1.0" encoding="utf-8"?>
 <p:sld xmlns:a="http://schemas.openxmlformats.org/drawingml/2006/main" xmlns:r="http://schemas.openxmlformats.org/officeDocument/2006/relationships" xmlns:p="http://schemas.openxmlformats.org/presentationml/2006/main">
-  <p:cSld name="Slide 1">
-    <p:bg>
-      <p:bgPr>
-        <a:solidFill>
-          <a:srgbClr val="FFFFFF"/>
-        </a:solidFill>
-        <a:effectLst/>
-      </p:bgPr>
-    </p:bg>
+  <p:cSld>
     <p:spTree>
       <p:nvGrpSpPr>
         <p:cNvPr id="1" name=""/>
@@ -722,7 +714,7 @@
               <a:buNone/>
             </a:pPr>
             <a:r>
-              <a:rPr lang="en-US" sz="3800" b="1" dirty="0" err="1">
+              <a:rPr lang="en-US" sz="3600" b="1" dirty="0" err="1">
                 <a:solidFill>
                   <a:srgbClr val="16233A"/>
                 </a:solidFill>
@@ -732,7 +724,7 @@
               </a:rPr>
               <a:t>Obiettivi</a:t>
             </a:r>
-            <a:endParaRPr lang="en-US" sz="3800" dirty="0"/>
+            <a:endParaRPr lang="en-US" sz="3600" dirty="0"/>
           </a:p>
         </p:txBody>
       </p:sp>
@@ -1012,8 +1004,8 @@
           </a:p>
         </p:txBody>
       </p:sp>
-      <mc:AlternateContent xmlns:mc="http://schemas.openxmlformats.org/markup-compatibility/2006">
-        <mc:Choice xmlns:a14="http://schemas.microsoft.com/office/drawing/2010/main" Requires="a14">
+      <mc:AlternateContent xmlns:mc="http://schemas.openxmlformats.org/markup-compatibility/2006" xmlns:a14="http://schemas.microsoft.com/office/drawing/2010/main">
+        <mc:Choice Requires="a14">
           <p:sp>
             <p:nvSpPr>
               <p:cNvPr id="12" name="TextBox 11">
@@ -1667,7 +1659,7 @@
             </p:txBody>
           </p:sp>
         </mc:Choice>
-        <mc:Fallback>
+        <mc:Fallback xmlns="">
           <p:sp>
             <p:nvSpPr>
               <p:cNvPr id="12" name="TextBox 11">
@@ -1712,8 +1704,8 @@
           </p:sp>
         </mc:Fallback>
       </mc:AlternateContent>
-      <mc:AlternateContent xmlns:mc="http://schemas.openxmlformats.org/markup-compatibility/2006">
-        <mc:Choice xmlns:a14="http://schemas.microsoft.com/office/drawing/2010/main" Requires="a14">
+      <mc:AlternateContent xmlns:mc="http://schemas.openxmlformats.org/markup-compatibility/2006" xmlns:a14="http://schemas.microsoft.com/office/drawing/2010/main">
+        <mc:Choice Requires="a14">
           <p:sp>
             <p:nvSpPr>
               <p:cNvPr id="14" name="TextBox 13">
@@ -2665,7 +2657,7 @@
             </p:txBody>
           </p:sp>
         </mc:Choice>
-        <mc:Fallback>
+        <mc:Fallback xmlns="">
           <p:sp>
             <p:nvSpPr>
               <p:cNvPr id="14" name="TextBox 13">
@@ -2710,8 +2702,8 @@
           </p:sp>
         </mc:Fallback>
       </mc:AlternateContent>
-      <mc:AlternateContent xmlns:mc="http://schemas.openxmlformats.org/markup-compatibility/2006">
-        <mc:Choice xmlns:a14="http://schemas.microsoft.com/office/drawing/2010/main" Requires="a14">
+      <mc:AlternateContent xmlns:mc="http://schemas.openxmlformats.org/markup-compatibility/2006" xmlns:a14="http://schemas.microsoft.com/office/drawing/2010/main">
+        <mc:Choice Requires="a14">
           <p:sp>
             <p:nvSpPr>
               <p:cNvPr id="16" name="TextBox 15">
@@ -2939,7 +2931,7 @@
             </p:txBody>
           </p:sp>
         </mc:Choice>
-        <mc:Fallback>
+        <mc:Fallback xmlns="">
           <p:sp>
             <p:nvSpPr>
               <p:cNvPr id="16" name="TextBox 15">
